--- a/deliverable/中期答辩_C_卡片色块.pptx
+++ b/deliverable/中期答辩_C_卡片色块.pptx
@@ -517,7 +517,7 @@
           <a:lstStyle/>
           <a:p>
             <a:r>
-              <a:t>各位老师好，我汇报的题目是《基于深度学习的阿尔茨海默症患者与健康人群肠道微生物组中抗菌肽的差异性研究》。本次中期检查按导师意见，重点汇报研究思路与各项工作的完成程度。</a:t>
+              <a:t>各位老师好，我汇报的题目是《基于深度学习的阿尔茨海默症患者与健康人群肠道微生物组中抗菌肽的差异性研究》。本次中期检查重点汇报研究思路与各项工作的完成程度。</a:t>
             </a:r>
           </a:p>
         </p:txBody>
@@ -8643,7 +8643,7 @@
                 <a:ea typeface="微软雅黑"/>
                 <a:cs typeface="Arial"/>
               </a:rPr>
-              <a:t>按导师意见，本次汇报重点说明研究思路与各项工作的完成程度</a:t>
+              <a:t>本次汇报重点说明研究思路与各项工作的完成程度</a:t>
             </a:r>
           </a:p>
         </p:txBody>

--- a/deliverable/中期答辩_C_卡片色块.pptx
+++ b/deliverable/中期答辩_C_卡片色块.pptx
@@ -657,7 +657,7 @@
           <a:lstStyle/>
           <a:p>
             <a:r>
-              <a:t>从进度上看，前五项任务已经全部完成，目前集中在机制关联分析与抑菌实验验证两件事上，论文撰写同步推进，整体进度与开题安排一致。</a:t>
+              <a:t>从进度上看，前五项任务已经全部完成，目前集中在 AD 特有肽与 AD 的关联分析和抑菌实验验证两件事上，论文撰写同步推进，整体进度与开题安排一致。</a:t>
             </a:r>
           </a:p>
         </p:txBody>
@@ -937,7 +937,7 @@
           <a:lstStyle/>
           <a:p>
             <a:r>
-              <a:t>预期成果包括：一套可复用的分析流程、健康人与各阶段特有的候选抗菌肽清单、机制关联的分析结果、抑菌活性的初步证据，以及一篇投稿论文与学位论文。</a:t>
+              <a:t>预期成果包括：一套可复用的分析流程、AD 特异性特有的候选抗菌肽清单、AD 特有肽与 AD 关联的分析结果、抑菌活性的初步证据，以及一篇投稿论文与学位论文。</a:t>
             </a:r>
           </a:p>
         </p:txBody>
@@ -1497,7 +1497,7 @@
           <a:lstStyle/>
           <a:p>
             <a:r>
-              <a:t>差异分析之后，引入宏蛋白组的表达证据做二次去重：只保留在蛋白层面真实存在并可检出的抗菌肽，再通过组内共有、组间特有的比较，得到健康人群特有与各疾病阶段特有的抗菌肽清单。这一步同样已经完成。</a:t>
+              <a:t>差异分析之后，引入宏蛋白组的表达证据做二次去重：只保留在蛋白层面真实存在并可检出的抗菌肽，再通过组内共有、组间特有的比较，筛出 AD 组特有（AD 特异性）的抗菌肽清单。这一步同样已经完成。</a:t>
             </a:r>
           </a:p>
         </p:txBody>
@@ -1567,7 +1567,7 @@
           <a:lstStyle/>
           <a:p>
             <a:r>
-              <a:t>接下来是与发病机制的关联分析。参照乙酰胆碱酯酶与 β-淀粉样肽复合物分子模拟研究的思路，从三个方向考察：与 Aβ 的相互作用、与 AChE 外周阴离子位点的结合，以及免疫与炎症通路。目前这一步正在进行。</a:t>
+              <a:t>接下来是 AD 特有肽与 AD 的关联分析。参照乙酰胆碱酯酶与 β-淀粉样肽复合物分子模拟研究的思路，按致病方向考察：是否促进 Aβ 成核与聚集、是否经 AChE 外周阴离子位点推动成核、是否经免疫与炎症通路放大神经炎症。这一步正在进行。</a:t>
             </a:r>
           </a:p>
         </p:txBody>
@@ -5599,7 +5599,7 @@
                 <a:ea typeface="微软雅黑"/>
                 <a:cs typeface="Arial"/>
               </a:rPr>
-              <a:t>数据资源、短肽库、三模型共识预测、分阶段差异分析与宏蛋白组去重均已完成；当前处于机制关联与抑菌实验验证阶段，论文撰写同步推进。</a:t>
+              <a:t>数据资源、短肽库、三模型共识预测、分阶段差异分析与宏蛋白组去重均已完成；当前处于 AD 特有肽与 AD 的关联分析、抑菌实验验证阶段，论文撰写同步推进。</a:t>
             </a:r>
           </a:p>
         </p:txBody>
@@ -5668,7 +5668,7 @@
                 <a:ea typeface="微软雅黑"/>
                 <a:cs typeface="Arial"/>
               </a:rPr>
-              <a:t>前五项已完成，机制关联分析与抑菌实验验证正在推进，整体进度与开题计划一致</a:t>
+              <a:t>前五项已完成，AD 特有肽与 AD 的关联分析与抑菌实验验证正在推进，整体进度与开题计划一致</a:t>
             </a:r>
           </a:p>
         </p:txBody>
@@ -6020,7 +6020,7 @@
                 <a:ea typeface="微软雅黑"/>
                 <a:cs typeface="Arial"/>
               </a:rPr>
-              <a:t>完成特有抗菌肽与 Aβ 聚集、AChE 结合及炎症通路的关联分析，形成候选肽清单。</a:t>
+              <a:t>完成 AD 特有肽与 Aβ 聚集、AChE 结合及炎症通路的关联分析。</a:t>
             </a:r>
           </a:p>
           <a:p>
@@ -6090,7 +6090,7 @@
                 <a:ea typeface="微软雅黑"/>
                 <a:cs typeface="Arial"/>
               </a:rPr>
-              <a:t>汇总候选抗菌肽、特有肽与验证结果，形成完整的图表与结论体系。</a:t>
+              <a:t>汇总 AD 特有肽、关联分析与验证结果，形成完整的图表与结论体系。</a:t>
             </a:r>
           </a:p>
           <a:p>
@@ -6686,7 +6686,7 @@
                 <a:ea typeface="微软雅黑"/>
                 <a:cs typeface="Arial"/>
               </a:rPr>
-              <a:t>开题拟做功能与可视化分析 → 下一步进行机制关联分析与抑菌实验验证</a:t>
+              <a:t>开题拟做功能与可视化分析 → 下一步做 AD 特有肽与 AD 的关联分析与抑菌实验验证</a:t>
             </a:r>
           </a:p>
         </p:txBody>
@@ -7328,7 +7328,7 @@
                 <a:ea typeface="微软雅黑"/>
                 <a:cs typeface="Arial"/>
               </a:rPr>
-              <a:t>应对：以分子对接与动力学模拟、文献比对为主，将研究定位为“线索发现”，不夸大因果结论。</a:t>
+              <a:t>应对：以分子对接与动力学模拟、文献比对为主，按致病方向检验 AD 特有肽是否推动 Aβ 聚集与神经炎症，将研究定位为“线索发现”，不夸大因果结论。</a:t>
             </a:r>
           </a:p>
         </p:txBody>
@@ -7784,7 +7784,7 @@
                 <a:ea typeface="微软雅黑"/>
                 <a:cs typeface="Arial"/>
               </a:rPr>
-              <a:t>健康人群与 AD 各阶段特有的候选抗菌肽清单，作为后续研究的线索集</a:t>
+              <a:t>AD 特异性特有的候选抗菌肽清单，作为后续研究的线索集</a:t>
             </a:r>
           </a:p>
           <a:p>
@@ -7819,7 +7819,7 @@
                 <a:ea typeface="微软雅黑"/>
                 <a:cs typeface="Arial"/>
               </a:rPr>
-              <a:t>候选抗菌肽与 AD 发病机制关联的分析结果（Aβ 聚集、AChE 结合、炎症通路）</a:t>
+              <a:t>AD 特有肽与 AD 发病机制关联的分析结果（Aβ 聚集、AChE 结合、炎症通路）</a:t>
             </a:r>
           </a:p>
           <a:p>
@@ -9030,7 +9030,7 @@
                 <a:ea typeface="微软雅黑"/>
                 <a:cs typeface="Arial"/>
               </a:rPr>
-              <a:t>主线：数据资源 → 短肽库 → 三模型共识预测 → 分阶段差异 → 去重筛选特有肽 → 机制关联与验证</a:t>
+              <a:t>主线：数据资源 → 短肽库 → 三模型共识预测 → 分阶段差异 → 去重筛选 AD 特有肽 → AD 特有肽与 AD 的关联分析</a:t>
             </a:r>
           </a:p>
         </p:txBody>
@@ -9545,7 +9545,7 @@
                 <a:ea typeface="微软雅黑"/>
                 <a:cs typeface="Arial"/>
               </a:rPr>
-              <a:t>AD 患者与健康人群肠道微生物组所编码的抗菌肽是否存在差异？能否筛选出各阶段特有的抗菌肽，并与 AD 的发病机制建立联系？</a:t>
+              <a:t>AD 患者与健康人群肠道微生物组所编码的抗菌肽是否存在差异？能否筛出 AD 组特有的抗菌肽，并与 AD 的发病机制建立联系？</a:t>
             </a:r>
           </a:p>
         </p:txBody>
@@ -9897,7 +9897,7 @@
                 <a:ea typeface="微软雅黑"/>
                 <a:cs typeface="Arial"/>
               </a:rPr>
-              <a:t>完成全队列宏基因组数据的统一处理与质量评估，获得高质量的微生物基因组参考集</a:t>
+              <a:t>完成全队列宏基因组数据的统一处理与质量评估，获得高质量的微生物基因组参考集（MetaBAT2 / MaxBin2 / CONCOCT 分箱，metaWRAP 提纯）</a:t>
             </a:r>
           </a:p>
           <a:p>
@@ -11259,7 +11259,7 @@
                 <a:ea typeface="微软雅黑"/>
                 <a:cs typeface="Arial"/>
               </a:rPr>
-              <a:t>先得到随病程变化的候选抗菌肽，再用表达证据过滤，为特有肽筛选做准备</a:t>
+              <a:t>先得到随病程变化的候选抗菌肽，再用表达证据过滤，为 AD 特异性特有肽筛选做准备</a:t>
             </a:r>
           </a:p>
         </p:txBody>
@@ -11506,7 +11506,7 @@
                 <a:ea typeface="微软雅黑"/>
                 <a:cs typeface="Arial"/>
               </a:rPr>
-              <a:t>已完成：宏蛋白组二次去重，筛选特有抗菌肽</a:t>
+              <a:t>已完成：宏蛋白组二次去重，筛选 AD 特异性特有抗菌肽</a:t>
             </a:r>
           </a:p>
         </p:txBody>
@@ -11624,7 +11624,7 @@
                 <a:ea typeface="微软雅黑"/>
                 <a:cs typeface="Arial"/>
               </a:rPr>
-              <a:t>在序列层面去冗余的基础上，引入宏蛋白组表达证据进行二次去重，只保留真实存在且被检出的抗菌肽，并据此区分健康人群特有与各疾病阶段特有的抗菌肽。</a:t>
+              <a:t>在序列层面去冗余的基础上，引入宏蛋白组表达证据进行二次去重，只保留真实存在且被检出的抗菌肽，并据此筛出 AD 组特有（AD 特异性）的抗菌肽。</a:t>
             </a:r>
           </a:p>
         </p:txBody>
@@ -11940,7 +11940,7 @@
                 <a:ea typeface="微软雅黑"/>
                 <a:cs typeface="Arial"/>
               </a:rPr>
-              <a:t>下一步：与 AD 发病机制的关联分析</a:t>
+              <a:t>下一步：AD 特有肽与 AD 的关联分析（致病方向）</a:t>
             </a:r>
           </a:p>
         </p:txBody>
@@ -12058,7 +12058,7 @@
                 <a:ea typeface="微软雅黑"/>
                 <a:cs typeface="Arial"/>
               </a:rPr>
-              <a:t>参照乙酰胆碱酯酶—β-淀粉样肽复合物分子模拟研究的思路，从三个方向考察特有抗菌肽与 AD 发病机制的关联：与 Aβ 的相互作用、与 AChE 外周阴离子位点的结合、以及免疫与炎症调节通路。</a:t>
+              <a:t>参照乙酰胆碱酯酶—β-淀粉样肽复合物分子模拟研究的思路，按致病方向考察 AD 特异性特有肽：与 Aβ 的相互作用是否促进成核与聚集、与 AChE 外周阴离子位点的结合是否推动成核、以及免疫与炎症通路。</a:t>
             </a:r>
           </a:p>
         </p:txBody>
@@ -12127,7 +12127,7 @@
                 <a:ea typeface="微软雅黑"/>
                 <a:cs typeface="Arial"/>
               </a:rPr>
-              <a:t>关联分析的落点：从“差异肽”推进到“可能与 AD 病理相关的肽”</a:t>
+              <a:t>关联分析的落点：判断 AD 特有肽是否推动 Aβ 聚集与神经炎症，而不是去证明它抑制 AD</a:t>
             </a:r>
           </a:p>
         </p:txBody>
